--- a/docs/project_canvas/Project Canvas.pptx
+++ b/docs/project_canvas/Project Canvas.pptx
@@ -197,7 +197,7 @@
           <a:p>
             <a:fld id="{F351F1B8-8327-4BF0-BF05-D38BD55D82BA}" type="datetimeFigureOut">
               <a:rPr lang="en-US" smtClean="0"/>
-              <a:t>5/8/2026</a:t>
+              <a:t>5/10/2026</a:t>
             </a:fld>
             <a:endParaRPr lang="en-US"/>
           </a:p>
@@ -844,7 +844,7 @@
           <a:p>
             <a:fld id="{C39F368F-1BAA-4507-AD9C-B99054D683C4}" type="datetimeFigureOut">
               <a:rPr lang="en-US" smtClean="0"/>
-              <a:t>5/8/2026</a:t>
+              <a:t>5/10/2026</a:t>
             </a:fld>
             <a:endParaRPr lang="en-US"/>
           </a:p>
@@ -1042,7 +1042,7 @@
           <a:p>
             <a:fld id="{C39F368F-1BAA-4507-AD9C-B99054D683C4}" type="datetimeFigureOut">
               <a:rPr lang="en-US" smtClean="0"/>
-              <a:t>5/8/2026</a:t>
+              <a:t>5/10/2026</a:t>
             </a:fld>
             <a:endParaRPr lang="en-US"/>
           </a:p>
@@ -1250,7 +1250,7 @@
           <a:p>
             <a:fld id="{C39F368F-1BAA-4507-AD9C-B99054D683C4}" type="datetimeFigureOut">
               <a:rPr lang="en-US" smtClean="0"/>
-              <a:t>5/8/2026</a:t>
+              <a:t>5/10/2026</a:t>
             </a:fld>
             <a:endParaRPr lang="en-US"/>
           </a:p>
@@ -1448,7 +1448,7 @@
           <a:p>
             <a:fld id="{C39F368F-1BAA-4507-AD9C-B99054D683C4}" type="datetimeFigureOut">
               <a:rPr lang="en-US" smtClean="0"/>
-              <a:t>5/8/2026</a:t>
+              <a:t>5/10/2026</a:t>
             </a:fld>
             <a:endParaRPr lang="en-US"/>
           </a:p>
@@ -1723,7 +1723,7 @@
           <a:p>
             <a:fld id="{C39F368F-1BAA-4507-AD9C-B99054D683C4}" type="datetimeFigureOut">
               <a:rPr lang="en-US" smtClean="0"/>
-              <a:t>5/8/2026</a:t>
+              <a:t>5/10/2026</a:t>
             </a:fld>
             <a:endParaRPr lang="en-US"/>
           </a:p>
@@ -1988,7 +1988,7 @@
           <a:p>
             <a:fld id="{C39F368F-1BAA-4507-AD9C-B99054D683C4}" type="datetimeFigureOut">
               <a:rPr lang="en-US" smtClean="0"/>
-              <a:t>5/8/2026</a:t>
+              <a:t>5/10/2026</a:t>
             </a:fld>
             <a:endParaRPr lang="en-US"/>
           </a:p>
@@ -2400,7 +2400,7 @@
           <a:p>
             <a:fld id="{C39F368F-1BAA-4507-AD9C-B99054D683C4}" type="datetimeFigureOut">
               <a:rPr lang="en-US" smtClean="0"/>
-              <a:t>5/8/2026</a:t>
+              <a:t>5/10/2026</a:t>
             </a:fld>
             <a:endParaRPr lang="en-US"/>
           </a:p>
@@ -2541,7 +2541,7 @@
           <a:p>
             <a:fld id="{C39F368F-1BAA-4507-AD9C-B99054D683C4}" type="datetimeFigureOut">
               <a:rPr lang="en-US" smtClean="0"/>
-              <a:t>5/8/2026</a:t>
+              <a:t>5/10/2026</a:t>
             </a:fld>
             <a:endParaRPr lang="en-US"/>
           </a:p>
@@ -2654,7 +2654,7 @@
           <a:p>
             <a:fld id="{C39F368F-1BAA-4507-AD9C-B99054D683C4}" type="datetimeFigureOut">
               <a:rPr lang="en-US" smtClean="0"/>
-              <a:t>5/8/2026</a:t>
+              <a:t>5/10/2026</a:t>
             </a:fld>
             <a:endParaRPr lang="en-US"/>
           </a:p>
@@ -2965,7 +2965,7 @@
           <a:p>
             <a:fld id="{C39F368F-1BAA-4507-AD9C-B99054D683C4}" type="datetimeFigureOut">
               <a:rPr lang="en-US" smtClean="0"/>
-              <a:t>5/8/2026</a:t>
+              <a:t>5/10/2026</a:t>
             </a:fld>
             <a:endParaRPr lang="en-US"/>
           </a:p>
@@ -3253,7 +3253,7 @@
           <a:p>
             <a:fld id="{C39F368F-1BAA-4507-AD9C-B99054D683C4}" type="datetimeFigureOut">
               <a:rPr lang="en-US" smtClean="0"/>
-              <a:t>5/8/2026</a:t>
+              <a:t>5/10/2026</a:t>
             </a:fld>
             <a:endParaRPr lang="en-US"/>
           </a:p>
@@ -3494,7 +3494,7 @@
           <a:p>
             <a:fld id="{C39F368F-1BAA-4507-AD9C-B99054D683C4}" type="datetimeFigureOut">
               <a:rPr lang="en-US" smtClean="0"/>
-              <a:t>5/8/2026</a:t>
+              <a:t>5/10/2026</a:t>
             </a:fld>
             <a:endParaRPr lang="en-US"/>
           </a:p>
@@ -3919,8 +3919,8 @@
         </p:nvSpPr>
         <p:spPr>
           <a:xfrm>
-            <a:off x="1" y="770117"/>
-            <a:ext cx="2651760" cy="2277744"/>
+            <a:off x="-6469" y="770117"/>
+            <a:ext cx="2658230" cy="2277744"/>
           </a:xfrm>
           <a:prstGeom prst="rect">
             <a:avLst/>
@@ -3928,7 +3928,10 @@
           <a:noFill/>
           <a:ln w="12700" cap="flat" cmpd="sng">
             <a:solidFill>
-              <a:srgbClr val="A5A5A5"/>
+              <a:schemeClr val="accent6">
+                <a:lumMod val="60000"/>
+                <a:lumOff val="40000"/>
+              </a:schemeClr>
             </a:solidFill>
             <a:prstDash val="solid"/>
             <a:miter lim="800000"/>
@@ -4042,7 +4045,10 @@
           <a:noFill/>
           <a:ln w="12700" cap="flat" cmpd="sng">
             <a:solidFill>
-              <a:srgbClr val="A5A5A5"/>
+              <a:schemeClr val="accent6">
+                <a:lumMod val="60000"/>
+                <a:lumOff val="40000"/>
+              </a:schemeClr>
             </a:solidFill>
             <a:prstDash val="solid"/>
             <a:miter lim="800000"/>
@@ -4522,7 +4528,10 @@
             <a:noFill/>
             <a:ln w="12700" cap="flat" cmpd="sng">
               <a:solidFill>
-                <a:srgbClr val="A5A5A5"/>
+                <a:schemeClr val="accent6">
+                  <a:lumMod val="60000"/>
+                  <a:lumOff val="40000"/>
+                </a:schemeClr>
               </a:solidFill>
               <a:prstDash val="solid"/>
               <a:miter lim="800000"/>
@@ -4594,8 +4603,8 @@
         </p:nvSpPr>
         <p:spPr>
           <a:xfrm>
-            <a:off x="5506717" y="775667"/>
-            <a:ext cx="6685283" cy="2272333"/>
+            <a:off x="5506717" y="770117"/>
+            <a:ext cx="6685283" cy="2277883"/>
           </a:xfrm>
           <a:prstGeom prst="rect">
             <a:avLst/>
@@ -4603,7 +4612,10 @@
           <a:noFill/>
           <a:ln w="12700" cap="flat" cmpd="sng">
             <a:solidFill>
-              <a:srgbClr val="A5A5A5"/>
+              <a:schemeClr val="accent6">
+                <a:lumMod val="60000"/>
+                <a:lumOff val="40000"/>
+              </a:schemeClr>
             </a:solidFill>
             <a:prstDash val="solid"/>
             <a:miter lim="800000"/>
@@ -5069,7 +5081,7 @@
         <p:spPr>
           <a:xfrm>
             <a:off x="2499360" y="3047859"/>
-            <a:ext cx="2052327" cy="3810137"/>
+            <a:ext cx="2052327" cy="3810141"/>
           </a:xfrm>
           <a:prstGeom prst="rect">
             <a:avLst/>
@@ -5077,7 +5089,10 @@
           <a:noFill/>
           <a:ln w="12700" cap="flat" cmpd="sng">
             <a:solidFill>
-              <a:srgbClr val="A5A5A5"/>
+              <a:schemeClr val="accent6">
+                <a:lumMod val="60000"/>
+                <a:lumOff val="40000"/>
+              </a:schemeClr>
             </a:solidFill>
             <a:prstDash val="solid"/>
             <a:miter lim="800000"/>
@@ -5245,7 +5260,7 @@
         <p:spPr>
           <a:xfrm>
             <a:off x="7406641" y="3047861"/>
-            <a:ext cx="4772973" cy="3810139"/>
+            <a:ext cx="4785359" cy="3810139"/>
           </a:xfrm>
           <a:prstGeom prst="rect">
             <a:avLst/>
@@ -5253,7 +5268,10 @@
           <a:noFill/>
           <a:ln w="12700" cap="flat" cmpd="sng">
             <a:solidFill>
-              <a:srgbClr val="A5A5A5"/>
+              <a:schemeClr val="accent6">
+                <a:lumMod val="60000"/>
+                <a:lumOff val="40000"/>
+              </a:schemeClr>
             </a:solidFill>
             <a:prstDash val="solid"/>
             <a:miter lim="800000"/>
@@ -5710,8 +5728,8 @@
         </p:nvSpPr>
         <p:spPr>
           <a:xfrm>
-            <a:off x="4551687" y="3047793"/>
-            <a:ext cx="2854954" cy="3810136"/>
+            <a:off x="4551687" y="3047792"/>
+            <a:ext cx="2854954" cy="3810208"/>
           </a:xfrm>
           <a:prstGeom prst="rect">
             <a:avLst/>
@@ -5719,7 +5737,10 @@
           <a:noFill/>
           <a:ln w="12700" cap="flat" cmpd="sng">
             <a:solidFill>
-              <a:srgbClr val="A5A5A5"/>
+              <a:schemeClr val="accent6">
+                <a:lumMod val="60000"/>
+                <a:lumOff val="40000"/>
+              </a:schemeClr>
             </a:solidFill>
             <a:prstDash val="solid"/>
             <a:miter lim="800000"/>
@@ -6053,10 +6074,18 @@
             <a:avLst/>
           </a:prstGeom>
           <a:solidFill>
-            <a:schemeClr val="accent1"/>
+            <a:schemeClr val="accent6">
+              <a:lumMod val="20000"/>
+              <a:lumOff val="80000"/>
+            </a:schemeClr>
           </a:solidFill>
           <a:ln>
-            <a:noFill/>
+            <a:solidFill>
+              <a:schemeClr val="accent6">
+                <a:lumMod val="40000"/>
+                <a:lumOff val="60000"/>
+              </a:schemeClr>
+            </a:solidFill>
           </a:ln>
         </p:spPr>
         <p:txBody>
@@ -6067,9 +6096,6 @@
           <a:p>
             <a:r>
               <a:rPr lang="en-GB" sz="2000" b="1" dirty="0">
-                <a:solidFill>
-                  <a:schemeClr val="bg1"/>
-                </a:solidFill>
                 <a:latin typeface="Calibri"/>
                 <a:ea typeface="Calibri"/>
                 <a:cs typeface="Calibri"/>
@@ -6081,9 +6107,6 @@
           <a:p>
             <a:r>
               <a:rPr lang="en-US" sz="1600" dirty="0">
-                <a:solidFill>
-                  <a:schemeClr val="bg1"/>
-                </a:solidFill>
                 <a:latin typeface="Calibri" panose="020F0502020204030204" pitchFamily="34" charset="0"/>
                 <a:ea typeface="Calibri" panose="020F0502020204030204" pitchFamily="34" charset="0"/>
                 <a:cs typeface="Calibri" panose="020F0502020204030204" pitchFamily="34" charset="0"/>
@@ -6091,9 +6114,6 @@
               <a:t>Title: Maximizing Revenue Stability by Minimizing Cancellations &amp; No-Shows</a:t>
             </a:r>
             <a:endParaRPr sz="1600" dirty="0">
-              <a:solidFill>
-                <a:schemeClr val="bg1"/>
-              </a:solidFill>
               <a:latin typeface="Calibri" panose="020F0502020204030204" pitchFamily="34" charset="0"/>
               <a:ea typeface="Calibri" panose="020F0502020204030204" pitchFamily="34" charset="0"/>
               <a:cs typeface="Calibri" panose="020F0502020204030204" pitchFamily="34" charset="0"/>
